--- a/Slides/1_Intro_Progr.pptx
+++ b/Slides/1_Intro_Progr.pptx
@@ -5,7 +5,7 @@
     <p:sldMasterId id="2147483684" r:id="rId4"/>
   </p:sldMasterIdLst>
   <p:notesMasterIdLst>
-    <p:notesMasterId r:id="rId57"/>
+    <p:notesMasterId r:id="rId56"/>
   </p:notesMasterIdLst>
   <p:sldIdLst>
     <p:sldId id="266" r:id="rId5"/>
@@ -59,7 +59,6 @@
     <p:sldId id="308" r:id="rId53"/>
     <p:sldId id="312" r:id="rId54"/>
     <p:sldId id="313" r:id="rId55"/>
-    <p:sldId id="296" r:id="rId56"/>
   </p:sldIdLst>
   <p:sldSz cx="13817600" cy="7772400"/>
   <p:notesSz cx="6858000" cy="9144000"/>
@@ -164,14 +163,6 @@
     </p:ext>
   </p:extLst>
 </p:presentation>
-</file>
-
-<file path=ppt/revisionInfo.xml><?xml version="1.0" encoding="utf-8"?>
-<p1510:revInfo xmlns:a="http://schemas.openxmlformats.org/drawingml/2006/main" xmlns:r="http://schemas.openxmlformats.org/officeDocument/2006/relationships" xmlns:p1510="http://schemas.microsoft.com/office/powerpoint/2015/10/main">
-  <p1510:revLst>
-    <p1510:client id="{55F19CDE-A45E-4DF2-AA46-9B144CD48584}" v="1" dt="2025-11-11T05:46:20.928"/>
-  </p1510:revLst>
-</p1510:revInfo>
 </file>
 
 <file path=ppt/changesInfos/changesInfo1.xml><?xml version="1.0" encoding="utf-8"?>
@@ -1754,6 +1745,53 @@
     </pc:docChg>
   </pc:docChgLst>
   <pc:docChgLst>
+    <pc:chgData name="Cesar Augusto Lopez Gallego" userId="0dfa9112-9251-4882-b472-cf2dfcee09d1" providerId="ADAL" clId="{C461B66E-5FF1-4D03-BABB-9754070DC314}"/>
+    <pc:docChg chg="custSel modSld">
+      <pc:chgData name="Cesar Augusto Lopez Gallego" userId="0dfa9112-9251-4882-b472-cf2dfcee09d1" providerId="ADAL" clId="{C461B66E-5FF1-4D03-BABB-9754070DC314}" dt="2025-11-13T00:41:19.913" v="48" actId="20577"/>
+      <pc:docMkLst>
+        <pc:docMk/>
+      </pc:docMkLst>
+      <pc:sldChg chg="modSp mod">
+        <pc:chgData name="Cesar Augusto Lopez Gallego" userId="0dfa9112-9251-4882-b472-cf2dfcee09d1" providerId="ADAL" clId="{C461B66E-5FF1-4D03-BABB-9754070DC314}" dt="2025-11-13T00:40:56.906" v="46" actId="1076"/>
+        <pc:sldMkLst>
+          <pc:docMk/>
+          <pc:sldMk cId="0" sldId="300"/>
+        </pc:sldMkLst>
+        <pc:graphicFrameChg chg="mod modGraphic">
+          <ac:chgData name="Cesar Augusto Lopez Gallego" userId="0dfa9112-9251-4882-b472-cf2dfcee09d1" providerId="ADAL" clId="{C461B66E-5FF1-4D03-BABB-9754070DC314}" dt="2025-11-13T00:40:56.906" v="46" actId="1076"/>
+          <ac:graphicFrameMkLst>
+            <pc:docMk/>
+            <pc:sldMk cId="0" sldId="300"/>
+            <ac:graphicFrameMk id="241" creationId="{00000000-0000-0000-0000-000000000000}"/>
+          </ac:graphicFrameMkLst>
+        </pc:graphicFrameChg>
+      </pc:sldChg>
+      <pc:sldChg chg="modSp mod">
+        <pc:chgData name="Cesar Augusto Lopez Gallego" userId="0dfa9112-9251-4882-b472-cf2dfcee09d1" providerId="ADAL" clId="{C461B66E-5FF1-4D03-BABB-9754070DC314}" dt="2025-11-13T00:41:19.913" v="48" actId="20577"/>
+        <pc:sldMkLst>
+          <pc:docMk/>
+          <pc:sldMk cId="0" sldId="301"/>
+        </pc:sldMkLst>
+        <pc:spChg chg="mod">
+          <ac:chgData name="Cesar Augusto Lopez Gallego" userId="0dfa9112-9251-4882-b472-cf2dfcee09d1" providerId="ADAL" clId="{C461B66E-5FF1-4D03-BABB-9754070DC314}" dt="2025-11-13T00:37:53.099" v="18" actId="1076"/>
+          <ac:spMkLst>
+            <pc:docMk/>
+            <pc:sldMk cId="0" sldId="301"/>
+            <ac:spMk id="247" creationId="{00000000-0000-0000-0000-000000000000}"/>
+          </ac:spMkLst>
+        </pc:spChg>
+        <pc:graphicFrameChg chg="mod modGraphic">
+          <ac:chgData name="Cesar Augusto Lopez Gallego" userId="0dfa9112-9251-4882-b472-cf2dfcee09d1" providerId="ADAL" clId="{C461B66E-5FF1-4D03-BABB-9754070DC314}" dt="2025-11-13T00:41:19.913" v="48" actId="20577"/>
+          <ac:graphicFrameMkLst>
+            <pc:docMk/>
+            <pc:sldMk cId="0" sldId="301"/>
+            <ac:graphicFrameMk id="248" creationId="{00000000-0000-0000-0000-000000000000}"/>
+          </ac:graphicFrameMkLst>
+        </pc:graphicFrameChg>
+      </pc:sldChg>
+    </pc:docChg>
+  </pc:docChgLst>
+  <pc:docChgLst>
     <pc:chgData name="Andres Benjumea Reinoso" userId="c592f61e-7499-43af-ae8b-a41a266c0bc3" providerId="ADAL" clId="{E6D6488C-5D73-4447-BA19-EBA395533C78}"/>
     <pc:docChg chg="custSel addSld modSld">
       <pc:chgData name="Andres Benjumea Reinoso" userId="c592f61e-7499-43af-ae8b-a41a266c0bc3" providerId="ADAL" clId="{E6D6488C-5D73-4447-BA19-EBA395533C78}" dt="2025-11-11T05:51:11.585" v="47" actId="1076"/>
@@ -1839,6 +1877,22 @@
       </pc:sldChg>
     </pc:docChg>
   </pc:docChgLst>
+  <pc:docChgLst>
+    <pc:chgData name="Cesar Augusto Lopez Gallego" userId="0dfa9112-9251-4882-b472-cf2dfcee09d1" providerId="ADAL" clId="{6041897A-3993-4644-82AD-C243534AC08E}"/>
+    <pc:docChg chg="delSld">
+      <pc:chgData name="Cesar Augusto Lopez Gallego" userId="0dfa9112-9251-4882-b472-cf2dfcee09d1" providerId="ADAL" clId="{6041897A-3993-4644-82AD-C243534AC08E}" dt="2025-11-13T22:09:44.768" v="0" actId="2696"/>
+      <pc:docMkLst>
+        <pc:docMk/>
+      </pc:docMkLst>
+      <pc:sldChg chg="del">
+        <pc:chgData name="Cesar Augusto Lopez Gallego" userId="0dfa9112-9251-4882-b472-cf2dfcee09d1" providerId="ADAL" clId="{6041897A-3993-4644-82AD-C243534AC08E}" dt="2025-11-13T22:09:44.768" v="0" actId="2696"/>
+        <pc:sldMkLst>
+          <pc:docMk/>
+          <pc:sldMk cId="652190281" sldId="296"/>
+        </pc:sldMkLst>
+      </pc:sldChg>
+    </pc:docChg>
+  </pc:docChgLst>
 </pc:chgInfo>
 </file>
 
@@ -1924,7 +1978,7 @@
           <a:p>
             <a:fld id="{2A27BBEF-3BEF-43AD-A156-F168EB232DF6}" type="datetimeFigureOut">
               <a:rPr lang="es-CO" smtClean="0"/>
-              <a:t>11/11/2025</a:t>
+              <a:t>13/11/2025</a:t>
             </a:fld>
             <a:endParaRPr lang="es-CO"/>
           </a:p>
@@ -19540,11 +19594,17 @@
         <p:nvGraphicFramePr>
           <p:cNvPr id="241" name="Google Shape;241;p28"/>
           <p:cNvGraphicFramePr/>
-          <p:nvPr/>
+          <p:nvPr>
+            <p:extLst>
+              <p:ext uri="{D42A27DB-BD31-4B8C-83A1-F6EECF244321}">
+                <p14:modId xmlns:p14="http://schemas.microsoft.com/office/powerpoint/2010/main" val="3490081945"/>
+              </p:ext>
+            </p:extLst>
+          </p:nvPr>
         </p:nvGraphicFramePr>
         <p:xfrm>
-          <a:off x="949954" y="2727910"/>
-          <a:ext cx="9211750" cy="2816422"/>
+          <a:off x="1482389" y="2924680"/>
+          <a:ext cx="10323788" cy="2816422"/>
         </p:xfrm>
         <a:graphic>
           <a:graphicData uri="http://schemas.openxmlformats.org/drawingml/2006/table">
@@ -19553,28 +19613,28 @@
                 <a:noFill/>
               </a:tblPr>
               <a:tblGrid>
-                <a:gridCol w="1317100">
+                <a:gridCol w="1476100">
                   <a:extLst>
                     <a:ext uri="{9D8B030D-6E8A-4147-A177-3AD203B41FA5}">
                       <a16:colId xmlns:a16="http://schemas.microsoft.com/office/drawing/2014/main" val="20000"/>
                     </a:ext>
                   </a:extLst>
                 </a:gridCol>
-                <a:gridCol w="1002075">
+                <a:gridCol w="1123045">
                   <a:extLst>
                     <a:ext uri="{9D8B030D-6E8A-4147-A177-3AD203B41FA5}">
                       <a16:colId xmlns:a16="http://schemas.microsoft.com/office/drawing/2014/main" val="20001"/>
                     </a:ext>
                   </a:extLst>
                 </a:gridCol>
-                <a:gridCol w="5949875">
+                <a:gridCol w="6668141">
                   <a:extLst>
                     <a:ext uri="{9D8B030D-6E8A-4147-A177-3AD203B41FA5}">
                       <a16:colId xmlns:a16="http://schemas.microsoft.com/office/drawing/2014/main" val="20002"/>
                     </a:ext>
                   </a:extLst>
                 </a:gridCol>
-                <a:gridCol w="942700">
+                <a:gridCol w="1056502">
                   <a:extLst>
                     <a:ext uri="{9D8B030D-6E8A-4147-A177-3AD203B41FA5}">
                       <a16:colId xmlns:a16="http://schemas.microsoft.com/office/drawing/2014/main" val="20003"/>
@@ -19683,10 +19743,10 @@
                         <a:buNone/>
                       </a:pPr>
                       <a:r>
-                        <a:rPr lang="es-CO" sz="2040"/>
-                        <a:t>Java</a:t>
+                        <a:rPr lang="es-CO" sz="2040" dirty="0"/>
+                        <a:t>Python</a:t>
                       </a:r>
-                      <a:endParaRPr/>
+                      <a:endParaRPr dirty="0"/>
                     </a:p>
                   </a:txBody>
                   <a:tcPr marL="91450" marR="91450" marT="45725" marB="45725"/>
@@ -19795,26 +19855,26 @@
                         <a:buNone/>
                       </a:pPr>
                       <a:r>
-                        <a:rPr lang="es-CO" sz="2040"/>
+                        <a:rPr lang="es-CO" sz="2040" dirty="0"/>
                         <a:t>Es verdadero cuando O</a:t>
                       </a:r>
                       <a:r>
-                        <a:rPr lang="es-CO" sz="2040" baseline="-25000"/>
+                        <a:rPr lang="es-CO" sz="2040" baseline="-25000" dirty="0"/>
                         <a:t>1</a:t>
                       </a:r>
                       <a:r>
-                        <a:rPr lang="es-CO" sz="2040"/>
+                        <a:rPr lang="es-CO" sz="2040" dirty="0"/>
                         <a:t> es igual a O</a:t>
                       </a:r>
                       <a:r>
-                        <a:rPr lang="es-CO" sz="2040" baseline="-25000"/>
+                        <a:rPr lang="es-CO" sz="2040" baseline="-25000" dirty="0"/>
                         <a:t>2</a:t>
                       </a:r>
                       <a:r>
-                        <a:rPr lang="es-CO" sz="2040"/>
+                        <a:rPr lang="es-CO" sz="2040" dirty="0"/>
                         <a:t> </a:t>
                       </a:r>
-                      <a:endParaRPr/>
+                      <a:endParaRPr dirty="0"/>
                     </a:p>
                   </a:txBody>
                   <a:tcPr marL="91450" marR="91450" marT="45725" marB="45725"/>
@@ -20537,10 +20597,10 @@
                         <a:buNone/>
                       </a:pPr>
                       <a:r>
-                        <a:rPr lang="es-CO" sz="2040"/>
+                        <a:rPr lang="es-CO" sz="2040" dirty="0"/>
                         <a:t>!=</a:t>
                       </a:r>
-                      <a:endParaRPr/>
+                      <a:endParaRPr dirty="0"/>
                     </a:p>
                   </a:txBody>
                   <a:tcPr marL="91450" marR="91450" marT="45725" marB="45725"/>
@@ -20630,8 +20690,8 @@
         </p:nvSpPr>
         <p:spPr>
           <a:xfrm>
-            <a:off x="949960" y="413809"/>
-            <a:ext cx="10661700" cy="1502400"/>
+            <a:off x="1701477" y="471683"/>
+            <a:ext cx="8660115" cy="917280"/>
           </a:xfrm>
           <a:prstGeom prst="rect">
             <a:avLst/>
@@ -20665,7 +20725,7 @@
               <a:buNone/>
             </a:pPr>
             <a:r>
-              <a:rPr lang="es-CO" sz="4987">
+              <a:rPr lang="es-CO" sz="4987" dirty="0">
                 <a:solidFill>
                   <a:schemeClr val="dk1"/>
                 </a:solidFill>
@@ -20676,7 +20736,7 @@
               </a:rPr>
               <a:t>Expresiones Lógicas (booleanas)</a:t>
             </a:r>
-            <a:endParaRPr/>
+            <a:endParaRPr dirty="0"/>
           </a:p>
         </p:txBody>
       </p:sp>
@@ -20684,11 +20744,17 @@
         <p:nvGraphicFramePr>
           <p:cNvPr id="248" name="Google Shape;248;p29"/>
           <p:cNvGraphicFramePr/>
-          <p:nvPr/>
+          <p:nvPr>
+            <p:extLst>
+              <p:ext uri="{D42A27DB-BD31-4B8C-83A1-F6EECF244321}">
+                <p14:modId xmlns:p14="http://schemas.microsoft.com/office/powerpoint/2010/main" val="2551096788"/>
+              </p:ext>
+            </p:extLst>
+          </p:nvPr>
         </p:nvGraphicFramePr>
         <p:xfrm>
-          <a:off x="1538844" y="2619370"/>
-          <a:ext cx="10273175" cy="1920280"/>
+          <a:off x="1144222" y="2770612"/>
+          <a:ext cx="10962897" cy="1920280"/>
         </p:xfrm>
         <a:graphic>
           <a:graphicData uri="http://schemas.openxmlformats.org/drawingml/2006/table">
@@ -20697,28 +20763,28 @@
                 <a:noFill/>
               </a:tblPr>
               <a:tblGrid>
-                <a:gridCol w="1468850">
+                <a:gridCol w="1559404">
                   <a:extLst>
                     <a:ext uri="{9D8B030D-6E8A-4147-A177-3AD203B41FA5}">
                       <a16:colId xmlns:a16="http://schemas.microsoft.com/office/drawing/2014/main" val="20000"/>
                     </a:ext>
                   </a:extLst>
                 </a:gridCol>
-                <a:gridCol w="1285175">
+                <a:gridCol w="1364405">
                   <a:extLst>
                     <a:ext uri="{9D8B030D-6E8A-4147-A177-3AD203B41FA5}">
                       <a16:colId xmlns:a16="http://schemas.microsoft.com/office/drawing/2014/main" val="20001"/>
                     </a:ext>
                   </a:extLst>
                 </a:gridCol>
-                <a:gridCol w="6845000">
+                <a:gridCol w="6742723">
                   <a:extLst>
                     <a:ext uri="{9D8B030D-6E8A-4147-A177-3AD203B41FA5}">
                       <a16:colId xmlns:a16="http://schemas.microsoft.com/office/drawing/2014/main" val="20002"/>
                     </a:ext>
                   </a:extLst>
                 </a:gridCol>
-                <a:gridCol w="674150">
+                <a:gridCol w="1296365">
                   <a:extLst>
                     <a:ext uri="{9D8B030D-6E8A-4147-A177-3AD203B41FA5}">
                       <a16:colId xmlns:a16="http://schemas.microsoft.com/office/drawing/2014/main" val="20003"/>
@@ -20827,10 +20893,10 @@
                         <a:buNone/>
                       </a:pPr>
                       <a:r>
-                        <a:rPr lang="es-CO" sz="2040"/>
-                        <a:t>Java</a:t>
+                        <a:rPr lang="es-CO" sz="2040" dirty="0"/>
+                        <a:t>Python</a:t>
                       </a:r>
-                      <a:endParaRPr/>
+                      <a:endParaRPr dirty="0"/>
                     </a:p>
                   </a:txBody>
                   <a:tcPr marL="91450" marR="91450" marT="45725" marB="45725"/>
@@ -20986,10 +21052,10 @@
                         <a:buNone/>
                       </a:pPr>
                       <a:r>
-                        <a:rPr lang="es-CO" sz="2040"/>
-                        <a:t>&amp;&amp;</a:t>
+                        <a:rPr lang="es-CO" sz="2040" dirty="0"/>
+                        <a:t>and</a:t>
                       </a:r>
-                      <a:endParaRPr/>
+                      <a:endParaRPr dirty="0"/>
                     </a:p>
                   </a:txBody>
                   <a:tcPr marL="91450" marR="91450" marT="45725" marB="45725"/>
@@ -21137,10 +21203,10 @@
                         <a:buNone/>
                       </a:pPr>
                       <a:r>
-                        <a:rPr lang="es-CO" sz="2040"/>
-                        <a:t>||</a:t>
+                        <a:rPr lang="es-CO" sz="2040" dirty="0" err="1"/>
+                        <a:t>or</a:t>
                       </a:r>
-                      <a:endParaRPr/>
+                      <a:endParaRPr dirty="0"/>
                     </a:p>
                   </a:txBody>
                   <a:tcPr marL="91450" marR="91450" marT="45725" marB="45725"/>
@@ -21256,10 +21322,10 @@
                         <a:buNone/>
                       </a:pPr>
                       <a:r>
-                        <a:rPr lang="es-CO" sz="2040"/>
-                        <a:t>!</a:t>
+                        <a:rPr lang="es-CO" sz="2040" dirty="0" err="1"/>
+                        <a:t>not</a:t>
                       </a:r>
-                      <a:endParaRPr/>
+                      <a:endParaRPr dirty="0"/>
                     </a:p>
                   </a:txBody>
                   <a:tcPr marL="91450" marR="91450" marT="45725" marB="45725"/>
@@ -24863,95 +24929,6 @@
 </p:sld>
 </file>
 
-<file path=ppt/slides/slide52.xml><?xml version="1.0" encoding="utf-8"?>
-<p:sld xmlns:a="http://schemas.openxmlformats.org/drawingml/2006/main" xmlns:r="http://schemas.openxmlformats.org/officeDocument/2006/relationships" xmlns:p="http://schemas.openxmlformats.org/presentationml/2006/main">
-  <p:cSld>
-    <p:spTree>
-      <p:nvGrpSpPr>
-        <p:cNvPr id="1" name=""/>
-        <p:cNvGrpSpPr/>
-        <p:nvPr/>
-      </p:nvGrpSpPr>
-      <p:grpSpPr>
-        <a:xfrm>
-          <a:off x="0" y="0"/>
-          <a:ext cx="0" cy="0"/>
-          <a:chOff x="0" y="0"/>
-          <a:chExt cx="0" cy="0"/>
-        </a:xfrm>
-      </p:grpSpPr>
-      <p:sp>
-        <p:nvSpPr>
-          <p:cNvPr id="2" name="Título 1">
-            <a:extLst>
-              <a:ext uri="{FF2B5EF4-FFF2-40B4-BE49-F238E27FC236}">
-                <a16:creationId xmlns:a16="http://schemas.microsoft.com/office/drawing/2014/main" id="{A4CEB27E-C9F6-41DB-AC01-EAF55F559767}"/>
-              </a:ext>
-            </a:extLst>
-          </p:cNvPr>
-          <p:cNvSpPr>
-            <a:spLocks noGrp="1"/>
-          </p:cNvSpPr>
-          <p:nvPr>
-            <p:ph type="title"/>
-          </p:nvPr>
-        </p:nvSpPr>
-        <p:spPr/>
-        <p:txBody>
-          <a:bodyPr/>
-          <a:lstStyle/>
-          <a:p>
-            <a:r>
-              <a:rPr lang="es-ES" dirty="0"/>
-              <a:t>Palabras Reservadas Python</a:t>
-            </a:r>
-            <a:endParaRPr lang="es-419" dirty="0"/>
-          </a:p>
-        </p:txBody>
-      </p:sp>
-      <p:pic>
-        <p:nvPicPr>
-          <p:cNvPr id="4" name="Imagen 3">
-            <a:extLst>
-              <a:ext uri="{FF2B5EF4-FFF2-40B4-BE49-F238E27FC236}">
-                <a16:creationId xmlns:a16="http://schemas.microsoft.com/office/drawing/2014/main" id="{13BDA199-148E-4087-B9E8-491295BE6D8F}"/>
-              </a:ext>
-            </a:extLst>
-          </p:cNvPr>
-          <p:cNvPicPr>
-            <a:picLocks noChangeAspect="1"/>
-          </p:cNvPicPr>
-          <p:nvPr/>
-        </p:nvPicPr>
-        <p:blipFill>
-          <a:blip r:embed="rId2"/>
-          <a:stretch>
-            <a:fillRect/>
-          </a:stretch>
-        </p:blipFill>
-        <p:spPr>
-          <a:xfrm>
-            <a:off x="2684270" y="2343106"/>
-            <a:ext cx="8126811" cy="4514894"/>
-          </a:xfrm>
-          <a:prstGeom prst="rect">
-            <a:avLst/>
-          </a:prstGeom>
-        </p:spPr>
-      </p:pic>
-    </p:spTree>
-    <p:extLst>
-      <p:ext uri="{BB962C8B-B14F-4D97-AF65-F5344CB8AC3E}">
-        <p14:creationId xmlns:p14="http://schemas.microsoft.com/office/powerpoint/2010/main" val="652190281"/>
-      </p:ext>
-    </p:extLst>
-  </p:cSld>
-  <p:clrMapOvr>
-    <a:masterClrMapping/>
-  </p:clrMapOvr>
-</p:sld>
-</file>
-
 <file path=ppt/slides/slide6.xml><?xml version="1.0" encoding="utf-8"?>
 <p:sld xmlns:a="http://schemas.openxmlformats.org/drawingml/2006/main" xmlns:r="http://schemas.openxmlformats.org/officeDocument/2006/relationships" xmlns:p="http://schemas.openxmlformats.org/presentationml/2006/main">
   <p:cSld>
@@ -26723,12 +26700,6 @@
 </file>
 
 <file path=customXml/item1.xml><?xml version="1.0" encoding="utf-8"?>
-<p:properties xmlns:p="http://schemas.microsoft.com/office/2006/metadata/properties" xmlns:xsi="http://www.w3.org/2001/XMLSchema-instance" xmlns:pc="http://schemas.microsoft.com/office/infopath/2007/PartnerControls">
-  <documentManagement/>
-</p:properties>
-</file>
-
-<file path=customXml/item2.xml><?xml version="1.0" encoding="utf-8"?>
 <?mso-contentType ?>
 <FormTemplates xmlns="http://schemas.microsoft.com/sharepoint/v3/contenttype/forms">
   <Display>DocumentLibraryForm</Display>
@@ -26737,7 +26708,7 @@
 </FormTemplates>
 </file>
 
-<file path=customXml/item3.xml><?xml version="1.0" encoding="utf-8"?>
+<file path=customXml/item2.xml><?xml version="1.0" encoding="utf-8"?>
 <ct:contentTypeSchema xmlns:ct="http://schemas.microsoft.com/office/2006/metadata/contentType" xmlns:ma="http://schemas.microsoft.com/office/2006/metadata/properties/metaAttributes" ct:_="" ma:_="" ma:contentTypeName="Document" ma:contentTypeID="0x010100A50542B5FEED5D43B123ECE0E1564D05" ma:contentTypeVersion="3" ma:contentTypeDescription="Create a new document." ma:contentTypeScope="" ma:versionID="898efa59bd9f7f5ff32fd6d31a260433">
   <xsd:schema xmlns:xsd="http://www.w3.org/2001/XMLSchema" xmlns:xs="http://www.w3.org/2001/XMLSchema" xmlns:p="http://schemas.microsoft.com/office/2006/metadata/properties" xmlns:ns2="d109785b-78df-45a7-bf97-c0338fb98fbc" targetNamespace="http://schemas.microsoft.com/office/2006/metadata/properties" ma:root="true" ma:fieldsID="d487716d9dcbf7a2f62bf649a479c16c" ns2:_="">
     <xsd:import namespace="d109785b-78df-45a7-bf97-c0338fb98fbc"/>
@@ -26875,23 +26846,13 @@
 </ct:contentTypeSchema>
 </file>
 
-<file path=customXml/itemProps1.xml><?xml version="1.0" encoding="utf-8"?>
-<ds:datastoreItem xmlns:ds="http://schemas.openxmlformats.org/officeDocument/2006/customXml" ds:itemID="{CC44471E-E6F8-4E31-99D9-B09ABE012890}">
-  <ds:schemaRefs>
-    <ds:schemaRef ds:uri="http://purl.org/dc/dcmitype/"/>
-    <ds:schemaRef ds:uri="http://purl.org/dc/elements/1.1/"/>
-    <ds:schemaRef ds:uri="http://www.w3.org/XML/1998/namespace"/>
-    <ds:schemaRef ds:uri="http://schemas.microsoft.com/office/2006/documentManagement/types"/>
-    <ds:schemaRef ds:uri="http://schemas.microsoft.com/office/infopath/2007/PartnerControls"/>
-    <ds:schemaRef ds:uri="d109785b-78df-45a7-bf97-c0338fb98fbc"/>
-    <ds:schemaRef ds:uri="http://schemas.openxmlformats.org/package/2006/metadata/core-properties"/>
-    <ds:schemaRef ds:uri="http://schemas.microsoft.com/office/2006/metadata/properties"/>
-    <ds:schemaRef ds:uri="http://purl.org/dc/terms/"/>
-  </ds:schemaRefs>
-</ds:datastoreItem>
+<file path=customXml/item3.xml><?xml version="1.0" encoding="utf-8"?>
+<p:properties xmlns:p="http://schemas.microsoft.com/office/2006/metadata/properties" xmlns:xsi="http://www.w3.org/2001/XMLSchema-instance" xmlns:pc="http://schemas.microsoft.com/office/infopath/2007/PartnerControls">
+  <documentManagement/>
+</p:properties>
 </file>
 
-<file path=customXml/itemProps2.xml><?xml version="1.0" encoding="utf-8"?>
+<file path=customXml/itemProps1.xml><?xml version="1.0" encoding="utf-8"?>
 <ds:datastoreItem xmlns:ds="http://schemas.openxmlformats.org/officeDocument/2006/customXml" ds:itemID="{DBADF4FC-6C58-4A5A-905D-75B982FA09F5}">
   <ds:schemaRefs>
     <ds:schemaRef ds:uri="http://schemas.microsoft.com/sharepoint/v3/contenttype/forms"/>
@@ -26899,7 +26860,7 @@
 </ds:datastoreItem>
 </file>
 
-<file path=customXml/itemProps3.xml><?xml version="1.0" encoding="utf-8"?>
+<file path=customXml/itemProps2.xml><?xml version="1.0" encoding="utf-8"?>
 <ds:datastoreItem xmlns:ds="http://schemas.openxmlformats.org/officeDocument/2006/customXml" ds:itemID="{3EF48EAA-F1F2-4764-AB90-C100AFD6D99D}">
   <ds:schemaRefs>
     <ds:schemaRef ds:uri="http://schemas.microsoft.com/office/2006/metadata/contentType"/>
@@ -26915,4 +26876,20 @@
     <ds:schemaRef ds:uri="http://schemas.microsoft.com/internal/obd"/>
   </ds:schemaRefs>
 </ds:datastoreItem>
+</file>
+
+<file path=customXml/itemProps3.xml><?xml version="1.0" encoding="utf-8"?>
+<ds:datastoreItem xmlns:ds="http://schemas.openxmlformats.org/officeDocument/2006/customXml" ds:itemID="{CC44471E-E6F8-4E31-99D9-B09ABE012890}">
+  <ds:schemaRefs>
+    <ds:schemaRef ds:uri="http://purl.org/dc/dcmitype/"/>
+    <ds:schemaRef ds:uri="http://purl.org/dc/elements/1.1/"/>
+    <ds:schemaRef ds:uri="http://www.w3.org/XML/1998/namespace"/>
+    <ds:schemaRef ds:uri="http://schemas.microsoft.com/office/2006/documentManagement/types"/>
+    <ds:schemaRef ds:uri="http://schemas.microsoft.com/office/infopath/2007/PartnerControls"/>
+    <ds:schemaRef ds:uri="d109785b-78df-45a7-bf97-c0338fb98fbc"/>
+    <ds:schemaRef ds:uri="http://schemas.openxmlformats.org/package/2006/metadata/core-properties"/>
+    <ds:schemaRef ds:uri="http://schemas.microsoft.com/office/2006/metadata/properties"/>
+    <ds:schemaRef ds:uri="http://purl.org/dc/terms/"/>
+  </ds:schemaRefs>
+</ds:datastoreItem>
 </file>